--- a/v3/outputs/ORBm_BMAp_Xenium_panel_funder.pptx
+++ b/v3/outputs/ORBm_BMAp_Xenium_panel_funder.pptx
@@ -3165,7 +3165,7 @@
                 </a:solidFill>
                 <a:latin typeface="Calibri"/>
               </a:rPr>
-              <a:t>The instrument reads a fixed number of genes per tissue section, so every slot has to be earned. First requirement: all 20 ORBm + BMAp cell types.</a:t>
+              <a:t>Xenium reads a fixed gene list. We kept a gene only if it names one of the 20 cell types, or reports morphine, circadian, or receptor state.</a:t>
             </a:r>
           </a:p>
         </p:txBody>
@@ -5882,7 +5882,7 @@
                 </a:solidFill>
                 <a:latin typeface="Calibri"/>
               </a:rPr>
-              <a:t>The 20 populations we must tell apart</a:t>
+              <a:t>The 20 cell types we have to tell apart</a:t>
             </a:r>
           </a:p>
         </p:txBody>
@@ -5921,7 +5921,7 @@
                 </a:solidFill>
                 <a:latin typeface="Calibri"/>
               </a:rPr>
-              <a:t>The target list comes from the Allen Brain Cell Atlas taxonomy: 12 populations in orbitofrontal cortex, 8 in basomedial amygdala.</a:t>
+              <a:t>12 in orbitofrontal cortex (ORBm), 8 in basomedial amygdala (BMAp). Every line is one type. The coloured gene is how that type is named.</a:t>
             </a:r>
           </a:p>
         </p:txBody>
@@ -5965,577 +5965,9 @@
           </a:p>
         </p:txBody>
       </p:sp>
-      <p:sp>
-        <p:nvSpPr>
-          <p:cNvPr id="5" name="Rounded Rectangle 4"/>
-          <p:cNvSpPr/>
-          <p:nvPr/>
-        </p:nvSpPr>
-        <p:spPr>
-          <a:xfrm>
-            <a:off x="365760" y="914400"/>
-            <a:ext cx="2697480" cy="1024128"/>
-          </a:xfrm>
-          <a:prstGeom prst="roundRect">
-            <a:avLst>
-              <a:gd name="adj" fmla="val 6000"/>
-            </a:avLst>
-          </a:prstGeom>
-          <a:solidFill>
-            <a:srgbClr val="F4F1EA"/>
-          </a:solidFill>
-          <a:ln w="15875">
-            <a:solidFill>
-              <a:srgbClr val="1D4E89"/>
-            </a:solidFill>
-          </a:ln>
-          <a:effectLst/>
-        </p:spPr>
-        <p:style>
-          <a:lnRef idx="1">
-            <a:schemeClr val="accent1"/>
-          </a:lnRef>
-          <a:fillRef idx="3">
-            <a:schemeClr val="accent1"/>
-          </a:fillRef>
-          <a:effectRef idx="2">
-            <a:schemeClr val="accent1"/>
-          </a:effectRef>
-          <a:fontRef idx="minor">
-            <a:schemeClr val="lt1"/>
-          </a:fontRef>
-        </p:style>
-        <p:txBody>
-          <a:bodyPr rtlCol="0" anchor="ctr"/>
-          <a:lstStyle/>
-          <a:p>
-            <a:pPr algn="ctr"/>
-          </a:p>
-        </p:txBody>
-      </p:sp>
-      <p:sp>
-        <p:nvSpPr>
-          <p:cNvPr id="6" name="TextBox 5"/>
-          <p:cNvSpPr txBox="1"/>
-          <p:nvPr/>
-        </p:nvSpPr>
-        <p:spPr>
-          <a:xfrm>
-            <a:off x="475488" y="960120"/>
-            <a:ext cx="2478024" cy="475488"/>
-          </a:xfrm>
-          <a:prstGeom prst="rect">
-            <a:avLst/>
-          </a:prstGeom>
-          <a:noFill/>
-        </p:spPr>
-        <p:txBody>
-          <a:bodyPr wrap="square" lIns="0" rIns="0" tIns="0" bIns="0">
-            <a:spAutoFit/>
-          </a:bodyPr>
-          <a:lstStyle/>
-          <a:p>
-            <a:pPr algn="ctr">
-              <a:spcAft>
-                <a:spcPts val="200"/>
-              </a:spcAft>
-            </a:pPr>
-            <a:r>
-              <a:rPr sz="2600" b="1">
-                <a:solidFill>
-                  <a:srgbClr val="1D4E89"/>
-                </a:solidFill>
-                <a:latin typeface="Calibri"/>
-              </a:rPr>
-              <a:t>12</a:t>
-            </a:r>
-          </a:p>
-        </p:txBody>
-      </p:sp>
-      <p:sp>
-        <p:nvSpPr>
-          <p:cNvPr id="7" name="TextBox 6"/>
-          <p:cNvSpPr txBox="1"/>
-          <p:nvPr/>
-        </p:nvSpPr>
-        <p:spPr>
-          <a:xfrm>
-            <a:off x="475488" y="1435607"/>
-            <a:ext cx="2478024" cy="457200"/>
-          </a:xfrm>
-          <a:prstGeom prst="rect">
-            <a:avLst/>
-          </a:prstGeom>
-          <a:noFill/>
-        </p:spPr>
-        <p:txBody>
-          <a:bodyPr wrap="square" lIns="0" rIns="0" tIns="0" bIns="0">
-            <a:spAutoFit/>
-          </a:bodyPr>
-          <a:lstStyle/>
-          <a:p>
-            <a:pPr algn="ctr">
-              <a:spcAft>
-                <a:spcPts val="0"/>
-              </a:spcAft>
-            </a:pPr>
-            <a:r>
-              <a:rPr sz="1150" b="0">
-                <a:solidFill>
-                  <a:srgbClr val="5B6472"/>
-                </a:solidFill>
-                <a:latin typeface="Calibri"/>
-              </a:rPr>
-              <a:t>ORBm populations</a:t>
-            </a:r>
-          </a:p>
-          <a:p>
-            <a:pPr algn="ctr">
-              <a:spcAft>
-                <a:spcPts val="0"/>
-              </a:spcAft>
-            </a:pPr>
-            <a:r>
-              <a:rPr sz="1150" b="0">
-                <a:solidFill>
-                  <a:srgbClr val="5B6472"/>
-                </a:solidFill>
-                <a:latin typeface="Calibri"/>
-              </a:rPr>
-              <a:t>83,406 Allen cells</a:t>
-            </a:r>
-          </a:p>
-        </p:txBody>
-      </p:sp>
-      <p:sp>
-        <p:nvSpPr>
-          <p:cNvPr id="8" name="Rounded Rectangle 7"/>
-          <p:cNvSpPr/>
-          <p:nvPr/>
-        </p:nvSpPr>
-        <p:spPr>
-          <a:xfrm>
-            <a:off x="3255264" y="914400"/>
-            <a:ext cx="2697480" cy="1024128"/>
-          </a:xfrm>
-          <a:prstGeom prst="roundRect">
-            <a:avLst>
-              <a:gd name="adj" fmla="val 6000"/>
-            </a:avLst>
-          </a:prstGeom>
-          <a:solidFill>
-            <a:srgbClr val="F4F1EA"/>
-          </a:solidFill>
-          <a:ln w="15875">
-            <a:solidFill>
-              <a:srgbClr val="2A6F97"/>
-            </a:solidFill>
-          </a:ln>
-          <a:effectLst/>
-        </p:spPr>
-        <p:style>
-          <a:lnRef idx="1">
-            <a:schemeClr val="accent1"/>
-          </a:lnRef>
-          <a:fillRef idx="3">
-            <a:schemeClr val="accent1"/>
-          </a:fillRef>
-          <a:effectRef idx="2">
-            <a:schemeClr val="accent1"/>
-          </a:effectRef>
-          <a:fontRef idx="minor">
-            <a:schemeClr val="lt1"/>
-          </a:fontRef>
-        </p:style>
-        <p:txBody>
-          <a:bodyPr rtlCol="0" anchor="ctr"/>
-          <a:lstStyle/>
-          <a:p>
-            <a:pPr algn="ctr"/>
-          </a:p>
-        </p:txBody>
-      </p:sp>
-      <p:sp>
-        <p:nvSpPr>
-          <p:cNvPr id="9" name="TextBox 8"/>
-          <p:cNvSpPr txBox="1"/>
-          <p:nvPr/>
-        </p:nvSpPr>
-        <p:spPr>
-          <a:xfrm>
-            <a:off x="3364992" y="960120"/>
-            <a:ext cx="2478024" cy="475488"/>
-          </a:xfrm>
-          <a:prstGeom prst="rect">
-            <a:avLst/>
-          </a:prstGeom>
-          <a:noFill/>
-        </p:spPr>
-        <p:txBody>
-          <a:bodyPr wrap="square" lIns="0" rIns="0" tIns="0" bIns="0">
-            <a:spAutoFit/>
-          </a:bodyPr>
-          <a:lstStyle/>
-          <a:p>
-            <a:pPr algn="ctr">
-              <a:spcAft>
-                <a:spcPts val="200"/>
-              </a:spcAft>
-            </a:pPr>
-            <a:r>
-              <a:rPr sz="2600" b="1">
-                <a:solidFill>
-                  <a:srgbClr val="2A6F97"/>
-                </a:solidFill>
-                <a:latin typeface="Calibri"/>
-              </a:rPr>
-              <a:t>8</a:t>
-            </a:r>
-          </a:p>
-        </p:txBody>
-      </p:sp>
-      <p:sp>
-        <p:nvSpPr>
-          <p:cNvPr id="10" name="TextBox 9"/>
-          <p:cNvSpPr txBox="1"/>
-          <p:nvPr/>
-        </p:nvSpPr>
-        <p:spPr>
-          <a:xfrm>
-            <a:off x="3364992" y="1435607"/>
-            <a:ext cx="2478024" cy="457200"/>
-          </a:xfrm>
-          <a:prstGeom prst="rect">
-            <a:avLst/>
-          </a:prstGeom>
-          <a:noFill/>
-        </p:spPr>
-        <p:txBody>
-          <a:bodyPr wrap="square" lIns="0" rIns="0" tIns="0" bIns="0">
-            <a:spAutoFit/>
-          </a:bodyPr>
-          <a:lstStyle/>
-          <a:p>
-            <a:pPr algn="ctr">
-              <a:spcAft>
-                <a:spcPts val="0"/>
-              </a:spcAft>
-            </a:pPr>
-            <a:r>
-              <a:rPr sz="1150" b="0">
-                <a:solidFill>
-                  <a:srgbClr val="5B6472"/>
-                </a:solidFill>
-                <a:latin typeface="Calibri"/>
-              </a:rPr>
-              <a:t>BMAp populations</a:t>
-            </a:r>
-          </a:p>
-          <a:p>
-            <a:pPr algn="ctr">
-              <a:spcAft>
-                <a:spcPts val="0"/>
-              </a:spcAft>
-            </a:pPr>
-            <a:r>
-              <a:rPr sz="1150" b="0">
-                <a:solidFill>
-                  <a:srgbClr val="5B6472"/>
-                </a:solidFill>
-                <a:latin typeface="Calibri"/>
-              </a:rPr>
-              <a:t>40,709 Allen cells</a:t>
-            </a:r>
-          </a:p>
-        </p:txBody>
-      </p:sp>
-      <p:sp>
-        <p:nvSpPr>
-          <p:cNvPr id="11" name="Rounded Rectangle 10"/>
-          <p:cNvSpPr/>
-          <p:nvPr/>
-        </p:nvSpPr>
-        <p:spPr>
-          <a:xfrm>
-            <a:off x="6144768" y="914400"/>
-            <a:ext cx="2697480" cy="1024128"/>
-          </a:xfrm>
-          <a:prstGeom prst="roundRect">
-            <a:avLst>
-              <a:gd name="adj" fmla="val 6000"/>
-            </a:avLst>
-          </a:prstGeom>
-          <a:solidFill>
-            <a:srgbClr val="F4F1EA"/>
-          </a:solidFill>
-          <a:ln w="15875">
-            <a:solidFill>
-              <a:srgbClr val="6B7C6A"/>
-            </a:solidFill>
-          </a:ln>
-          <a:effectLst/>
-        </p:spPr>
-        <p:style>
-          <a:lnRef idx="1">
-            <a:schemeClr val="accent1"/>
-          </a:lnRef>
-          <a:fillRef idx="3">
-            <a:schemeClr val="accent1"/>
-          </a:fillRef>
-          <a:effectRef idx="2">
-            <a:schemeClr val="accent1"/>
-          </a:effectRef>
-          <a:fontRef idx="minor">
-            <a:schemeClr val="lt1"/>
-          </a:fontRef>
-        </p:style>
-        <p:txBody>
-          <a:bodyPr rtlCol="0" anchor="ctr"/>
-          <a:lstStyle/>
-          <a:p>
-            <a:pPr algn="ctr"/>
-          </a:p>
-        </p:txBody>
-      </p:sp>
-      <p:sp>
-        <p:nvSpPr>
-          <p:cNvPr id="12" name="TextBox 11"/>
-          <p:cNvSpPr txBox="1"/>
-          <p:nvPr/>
-        </p:nvSpPr>
-        <p:spPr>
-          <a:xfrm>
-            <a:off x="6254496" y="960120"/>
-            <a:ext cx="2478024" cy="475488"/>
-          </a:xfrm>
-          <a:prstGeom prst="rect">
-            <a:avLst/>
-          </a:prstGeom>
-          <a:noFill/>
-        </p:spPr>
-        <p:txBody>
-          <a:bodyPr wrap="square" lIns="0" rIns="0" tIns="0" bIns="0">
-            <a:spAutoFit/>
-          </a:bodyPr>
-          <a:lstStyle/>
-          <a:p>
-            <a:pPr algn="ctr">
-              <a:spcAft>
-                <a:spcPts val="200"/>
-              </a:spcAft>
-            </a:pPr>
-            <a:r>
-              <a:rPr sz="2600" b="1">
-                <a:solidFill>
-                  <a:srgbClr val="6B7C6A"/>
-                </a:solidFill>
-                <a:latin typeface="Calibri"/>
-              </a:rPr>
-              <a:t>124,115</a:t>
-            </a:r>
-          </a:p>
-        </p:txBody>
-      </p:sp>
-      <p:sp>
-        <p:nvSpPr>
-          <p:cNvPr id="13" name="TextBox 12"/>
-          <p:cNvSpPr txBox="1"/>
-          <p:nvPr/>
-        </p:nvSpPr>
-        <p:spPr>
-          <a:xfrm>
-            <a:off x="6254496" y="1435607"/>
-            <a:ext cx="2478024" cy="457200"/>
-          </a:xfrm>
-          <a:prstGeom prst="rect">
-            <a:avLst/>
-          </a:prstGeom>
-          <a:noFill/>
-        </p:spPr>
-        <p:txBody>
-          <a:bodyPr wrap="square" lIns="0" rIns="0" tIns="0" bIns="0">
-            <a:spAutoFit/>
-          </a:bodyPr>
-          <a:lstStyle/>
-          <a:p>
-            <a:pPr algn="ctr">
-              <a:spcAft>
-                <a:spcPts val="0"/>
-              </a:spcAft>
-            </a:pPr>
-            <a:r>
-              <a:rPr sz="1150" b="0">
-                <a:solidFill>
-                  <a:srgbClr val="5B6472"/>
-                </a:solidFill>
-                <a:latin typeface="Calibri"/>
-              </a:rPr>
-              <a:t>cells in the 20</a:t>
-            </a:r>
-          </a:p>
-          <a:p>
-            <a:pPr algn="ctr">
-              <a:spcAft>
-                <a:spcPts val="0"/>
-              </a:spcAft>
-            </a:pPr>
-            <a:r>
-              <a:rPr sz="1150" b="0">
-                <a:solidFill>
-                  <a:srgbClr val="5B6472"/>
-                </a:solidFill>
-                <a:latin typeface="Calibri"/>
-              </a:rPr>
-              <a:t>target populations</a:t>
-            </a:r>
-          </a:p>
-        </p:txBody>
-      </p:sp>
-      <p:sp>
-        <p:nvSpPr>
-          <p:cNvPr id="14" name="Rounded Rectangle 13"/>
-          <p:cNvSpPr/>
-          <p:nvPr/>
-        </p:nvSpPr>
-        <p:spPr>
-          <a:xfrm>
-            <a:off x="9034272" y="914400"/>
-            <a:ext cx="2697480" cy="1024128"/>
-          </a:xfrm>
-          <a:prstGeom prst="roundRect">
-            <a:avLst>
-              <a:gd name="adj" fmla="val 6000"/>
-            </a:avLst>
-          </a:prstGeom>
-          <a:solidFill>
-            <a:srgbClr val="F4F1EA"/>
-          </a:solidFill>
-          <a:ln w="15875">
-            <a:solidFill>
-              <a:srgbClr val="C44536"/>
-            </a:solidFill>
-          </a:ln>
-          <a:effectLst/>
-        </p:spPr>
-        <p:style>
-          <a:lnRef idx="1">
-            <a:schemeClr val="accent1"/>
-          </a:lnRef>
-          <a:fillRef idx="3">
-            <a:schemeClr val="accent1"/>
-          </a:fillRef>
-          <a:effectRef idx="2">
-            <a:schemeClr val="accent1"/>
-          </a:effectRef>
-          <a:fontRef idx="minor">
-            <a:schemeClr val="lt1"/>
-          </a:fontRef>
-        </p:style>
-        <p:txBody>
-          <a:bodyPr rtlCol="0" anchor="ctr"/>
-          <a:lstStyle/>
-          <a:p>
-            <a:pPr algn="ctr"/>
-          </a:p>
-        </p:txBody>
-      </p:sp>
-      <p:sp>
-        <p:nvSpPr>
-          <p:cNvPr id="15" name="TextBox 14"/>
-          <p:cNvSpPr txBox="1"/>
-          <p:nvPr/>
-        </p:nvSpPr>
-        <p:spPr>
-          <a:xfrm>
-            <a:off x="9144000" y="960120"/>
-            <a:ext cx="2478024" cy="475488"/>
-          </a:xfrm>
-          <a:prstGeom prst="rect">
-            <a:avLst/>
-          </a:prstGeom>
-          <a:noFill/>
-        </p:spPr>
-        <p:txBody>
-          <a:bodyPr wrap="square" lIns="0" rIns="0" tIns="0" bIns="0">
-            <a:spAutoFit/>
-          </a:bodyPr>
-          <a:lstStyle/>
-          <a:p>
-            <a:pPr algn="ctr">
-              <a:spcAft>
-                <a:spcPts val="200"/>
-              </a:spcAft>
-            </a:pPr>
-            <a:r>
-              <a:rPr sz="2600" b="1">
-                <a:solidFill>
-                  <a:srgbClr val="C44536"/>
-                </a:solidFill>
-                <a:latin typeface="Calibri"/>
-              </a:rPr>
-              <a:t>20 / 20</a:t>
-            </a:r>
-          </a:p>
-        </p:txBody>
-      </p:sp>
-      <p:sp>
-        <p:nvSpPr>
-          <p:cNvPr id="16" name="TextBox 15"/>
-          <p:cNvSpPr txBox="1"/>
-          <p:nvPr/>
-        </p:nvSpPr>
-        <p:spPr>
-          <a:xfrm>
-            <a:off x="9144000" y="1435607"/>
-            <a:ext cx="2478024" cy="457200"/>
-          </a:xfrm>
-          <a:prstGeom prst="rect">
-            <a:avLst/>
-          </a:prstGeom>
-          <a:noFill/>
-        </p:spPr>
-        <p:txBody>
-          <a:bodyPr wrap="square" lIns="0" rIns="0" tIns="0" bIns="0">
-            <a:spAutoFit/>
-          </a:bodyPr>
-          <a:lstStyle/>
-          <a:p>
-            <a:pPr algn="ctr">
-              <a:spcAft>
-                <a:spcPts val="0"/>
-              </a:spcAft>
-            </a:pPr>
-            <a:r>
-              <a:rPr sz="1150" b="0">
-                <a:solidFill>
-                  <a:srgbClr val="5B6472"/>
-                </a:solidFill>
-                <a:latin typeface="Calibri"/>
-              </a:rPr>
-              <a:t>have separators</a:t>
-            </a:r>
-          </a:p>
-          <a:p>
-            <a:pPr algn="ctr">
-              <a:spcAft>
-                <a:spcPts val="0"/>
-              </a:spcAft>
-            </a:pPr>
-            <a:r>
-              <a:rPr sz="1150" b="0">
-                <a:solidFill>
-                  <a:srgbClr val="5B6472"/>
-                </a:solidFill>
-                <a:latin typeface="Calibri"/>
-              </a:rPr>
-              <a:t>on the final panel</a:t>
-            </a:r>
-          </a:p>
-        </p:txBody>
-      </p:sp>
       <p:pic>
         <p:nvPicPr>
-          <p:cNvPr id="17" name="Picture 16" descr="s4_populations.png"/>
+          <p:cNvPr id="5" name="Picture 4" descr="s4_populations.png"/>
           <p:cNvPicPr>
             <a:picLocks noChangeAspect="1"/>
           </p:cNvPicPr>
@@ -6549,8 +5981,8 @@
         </p:blipFill>
         <p:spPr>
           <a:xfrm>
-            <a:off x="1024128" y="2103120"/>
-            <a:ext cx="10149840" cy="4158113"/>
+            <a:off x="365760" y="896112"/>
+            <a:ext cx="11430000" cy="4668937"/>
           </a:xfrm>
           <a:prstGeom prst="rect">
             <a:avLst/>
